--- a/SAKINA_Pitch_Deck_AR.pptx
+++ b/SAKINA_Pitch_Deck_AR.pptx
@@ -2108,7 +2108,7 @@
                 <a:ea typeface="Arial" pitchFamily="34" charset="-122"/>
                 <a:cs typeface="Arial" pitchFamily="34" charset="-120"/>
               </a:rPr>
-              <a:t>فريق سكينة · محمود همام · تقديم مرحلة الفكرة، 20 أغسطس 2026</a:t>
+              <a:t>فريق سكينة · محمود سماحة · تقديم مرحلة الفكرة، 20 أغسطس 2026</a:t>
             </a:r>
             <a:endParaRPr lang="en-US" sz="1100" dirty="0"/>
           </a:p>
@@ -4128,7 +4128,7 @@
                 <a:ea typeface="Arial" pitchFamily="34" charset="-122"/>
                 <a:cs typeface="Arial" pitchFamily="34" charset="-120"/>
               </a:rPr>
-              <a:t>محمود همام — بانٍ منفرد: تصميم الوكيل، تكامل CAMARA، البنية الكاملة</a:t>
+              <a:t>محمود سماحة — بانٍ منفرد: تصميم الوكيل، تكامل CAMARA، البنية الكاملة</a:t>
             </a:r>
             <a:endParaRPr lang="en-US" sz="1300" dirty="0"/>
           </a:p>
@@ -4167,7 +4167,7 @@
                 <a:ea typeface="Consolas" pitchFamily="34" charset="-122"/>
                 <a:cs typeface="Consolas" pitchFamily="34" charset="-120"/>
               </a:rPr>
-              <a:t>mhmood.hmmam@gmail.com</a:t>
+              <a:t>mhmud.smaha@gmail.com</a:t>
             </a:r>
             <a:endParaRPr lang="en-US" sz="1200" dirty="0"/>
           </a:p>

--- a/SAKINA_Pitch_Deck_AR.pptx
+++ b/SAKINA_Pitch_Deck_AR.pptx
@@ -16,6 +16,7 @@
     <p:sldId id="264" r:id="rId10"/>
     <p:sldId id="265" r:id="rId11"/>
     <p:sldId id="266" r:id="rId12"/>
+    <p:sldId id="268" r:id="rId19"/>
     <p:sldId id="267" r:id="rId13"/>
   </p:sldIdLst>
   <p:notesMasterIdLst>
@@ -2108,7 +2109,7 @@
                 <a:ea typeface="Arial" pitchFamily="34" charset="-122"/>
                 <a:cs typeface="Arial" pitchFamily="34" charset="-120"/>
               </a:rPr>
-              <a:t>فريق سكينة · محمود سماحة · تقديم مرحلة الفكرة، 20 أغسطس 2026</a:t>
+              <a:t>فريق سكينة · محمود سماحة · تقديم مرحلة النموذج الأولي، سبتمبر 2026</a:t>
             </a:r>
             <a:endParaRPr lang="en-US" sz="1100" dirty="0"/>
           </a:p>
@@ -3667,7 +3668,7 @@
                 <a:ea typeface="Arial" pitchFamily="34" charset="-122"/>
                 <a:cs typeface="Arial" pitchFamily="34" charset="-120"/>
               </a:rPr>
-              <a:t>5 عائلات واجهات CAMARA تم التحقق منها حيًّا في آلة حالة LangGraph واحدة؛ الحواف الشرطية يختارها الوكيل لا المشغّل</a:t>
+              <a:t>7 واجهات CAMARA، ست منها منسَّقة في آلة حالة LangGraph واحدة؛ الحواف الشرطية يختارها الوكيل لا المشغّل</a:t>
             </a:r>
             <a:endParaRPr lang="en-US" sz="1200" dirty="0"/>
           </a:p>
@@ -3771,7 +3772,7 @@
                 <a:ea typeface="Arial" pitchFamily="34" charset="-122"/>
                 <a:cs typeface="Arial" pitchFamily="34" charset="-120"/>
               </a:rPr>
-              <a:t>مكالمات Nokia NaC حية، جلسة QoD حقيقية أُنشئت وحُرِّرت، 21 اختبارًا ناجحًا، وضع إعادة التشغيل لا يحتاج مفاتيح</a:t>
+              <a:t>منشور على Streamlit Cloud، مكالمات Nokia NaC حية، جلسة QoD حقيقية أُنشئت وحُرِّرت، 53 اختبارًا ناجحًا مع تكامل مستمر، وضع إعادة التشغيل لا يحتاج مفاتيح</a:t>
             </a:r>
             <a:endParaRPr lang="en-US" sz="1200" dirty="0"/>
           </a:p>
@@ -4206,7 +4207,7 @@
                 <a:ea typeface="Arial" pitchFamily="34" charset="-122"/>
                 <a:cs typeface="Arial" pitchFamily="34" charset="-120"/>
               </a:rPr>
-              <a:t>التالي</a:t>
+              <a:t>حيّ الآن</a:t>
             </a:r>
             <a:endParaRPr lang="en-US" sz="1100" dirty="0"/>
           </a:p>
@@ -4245,7 +4246,7 @@
                 <a:ea typeface="Arial" pitchFamily="34" charset="-122"/>
                 <a:cs typeface="Arial" pitchFamily="34" charset="-120"/>
               </a:rPr>
-              <a:t>تقوية النموذج الأولي حتى 8 سبتمبر · عرض حي وتقديم بحلول 12 سبتمبر</a:t>
+              <a:t>sakina.streamlit.app · github.com/MhmoodHmmam/sakina · فيديو توضيحي بتعليق صوتي مع التقديم</a:t>
             </a:r>
             <a:endParaRPr lang="en-US" sz="1400" dirty="0"/>
           </a:p>
@@ -4285,6 +4286,1011 @@
                 <a:cs typeface="Arial" pitchFamily="34" charset="-120"/>
               </a:rPr>
               <a:t>هاكاثون GSMA MENA IGNITE · الموضوع 3 — السياحة والحج والابتكار الثقافي</a:t>
+            </a:r>
+            <a:endParaRPr lang="en-US" sz="1000" dirty="0"/>
+          </a:p>
+        </p:txBody>
+      </p:sp>
+    </p:spTree>
+  </p:cSld>
+  <p:clrMapOvr>
+    <a:masterClrMapping/>
+  </p:clrMapOvr>
+</p:sld>
+</file>
+
+<file path=ppt/slides/slide13.xml><?xml version="1.0" encoding="utf-8"?>
+<p:sld xmlns:a="http://schemas.openxmlformats.org/drawingml/2006/main" xmlns:r="http://schemas.openxmlformats.org/officeDocument/2006/relationships" xmlns:p="http://schemas.openxmlformats.org/presentationml/2006/main">
+  <p:cSld name="Slide 10">
+    <p:bg>
+      <p:bgPr>
+        <a:solidFill>
+          <a:srgbClr val="FFFFFF"/>
+        </a:solidFill>
+      </p:bgPr>
+    </p:bg>
+    <p:spTree>
+      <p:nvGrpSpPr>
+        <p:cNvPr id="1" name=""/>
+        <p:cNvGrpSpPr/>
+        <p:nvPr/>
+      </p:nvGrpSpPr>
+      <p:grpSpPr>
+        <a:xfrm>
+          <a:off x="0" y="0"/>
+          <a:ext cx="0" cy="0"/>
+          <a:chOff x="0" y="0"/>
+          <a:chExt cx="0" cy="0"/>
+        </a:xfrm>
+      </p:grpSpPr>
+      <p:sp>
+        <p:nvSpPr>
+          <p:cNvPr id="2" name="Text 0"/>
+          <p:cNvSpPr/>
+          <p:nvPr/>
+        </p:nvSpPr>
+        <p:spPr>
+          <a:xfrm>
+            <a:off x="4325112" y="365760"/>
+            <a:ext cx="7315200" cy="320040"/>
+          </a:xfrm>
+          <a:prstGeom prst="rect">
+            <a:avLst/>
+          </a:prstGeom>
+          <a:noFill/>
+          <a:ln/>
+        </p:spPr>
+        <p:txBody>
+          <a:bodyPr wrap="square" lIns="0" tIns="0" rIns="0" bIns="0" rtlCol="0" anchor="ctr"/>
+          <a:lstStyle/>
+          <a:p>
+            <a:pPr rtl="1" algn="r" indent="0" marL="0">
+              <a:buNone/>
+            </a:pPr>
+            <a:r>
+              <a:rPr lang="en-US" sz="1100" b="1" dirty="0">
+                <a:solidFill>
+                  <a:srgbClr val="0F6E56"/>
+                </a:solidFill>
+                <a:latin typeface="Arial" pitchFamily="34" charset="0"/>
+                <a:ea typeface="Arial" pitchFamily="34" charset="-122"/>
+                <a:cs typeface="Arial" pitchFamily="34" charset="-120"/>
+              </a:rPr>
+              <a:t>ما الفرق</a:t>
+            </a:r>
+            <a:endParaRPr lang="en-US" sz="1100" dirty="0"/>
+          </a:p>
+        </p:txBody>
+      </p:sp>
+      <p:sp>
+        <p:nvSpPr>
+          <p:cNvPr id="3" name="Text 1"/>
+          <p:cNvSpPr/>
+          <p:nvPr/>
+        </p:nvSpPr>
+        <p:spPr>
+          <a:xfrm>
+            <a:off x="548640" y="640080"/>
+            <a:ext cx="11064240" cy="594360"/>
+          </a:xfrm>
+          <a:prstGeom prst="rect">
+            <a:avLst/>
+          </a:prstGeom>
+          <a:noFill/>
+          <a:ln/>
+        </p:spPr>
+        <p:txBody>
+          <a:bodyPr wrap="square" lIns="0" tIns="0" rIns="0" bIns="0" rtlCol="0" anchor="ctr"/>
+          <a:lstStyle/>
+          <a:p>
+            <a:pPr rtl="1" algn="r" indent="0" marL="0">
+              <a:buNone/>
+            </a:pPr>
+            <a:r>
+              <a:rPr lang="en-US" sz="2100" b="1" dirty="0">
+                <a:solidFill>
+                  <a:srgbClr val="16202B"/>
+                </a:solidFill>
+                <a:latin typeface="Traditional Arabic" pitchFamily="34" charset="0"/>
+                <a:ea typeface="Traditional Arabic" pitchFamily="34" charset="-122"/>
+                <a:cs typeface="Traditional Arabic" pitchFamily="34" charset="-120"/>
+              </a:rPr>
+              <a:t>على أرضٍ معروفة — وخطوة أبعد</a:t>
+            </a:r>
+            <a:endParaRPr lang="en-US" sz="2100" dirty="0"/>
+          </a:p>
+        </p:txBody>
+      </p:sp>
+      <p:graphicFrame>
+        <p:nvGraphicFramePr>
+          <p:cNvPr id="11" name="Table 0"/>
+          <p:cNvGraphicFramePr>
+            <a:graphicFrameLocks noGrp="1"/>
+          </p:cNvGraphicFramePr>
+          <p:nvPr>
+            <p:extLst>
+              <p:ext uri="{D42A27DB-BD31-4B8C-83A1-F6EECF244321}">
+                <p14:modId xmlns:p14="http://schemas.microsoft.com/office/powerpoint/2010/main" val="1579011935"/>
+              </p:ext>
+            </p:extLst>
+          </p:nvPr>
+        </p:nvGraphicFramePr>
+        <p:xfrm>
+          <a:off x="4325112" y="1417320"/>
+          <a:ext cx="7315200" cy="4709160"/>
+        </p:xfrm>
+        <a:graphic>
+          <a:graphicData uri="http://schemas.openxmlformats.org/drawingml/2006/table">
+            <a:tbl>
+              <a:tblPr/>
+              <a:tblGrid>
+                <a:gridCol w="4242816"/>
+                <a:gridCol w="3072384"/>
+              </a:tblGrid>
+              <a:tr h="941832">
+                <a:tc>
+                  <a:txBody>
+                    <a:bodyPr/>
+                    <a:lstStyle/>
+                    <a:p>
+                      <a:pPr algn="r" indent="0" marL="0">
+                        <a:buNone/>
+                      </a:pPr>
+                      <a:r>
+                        <a:rPr lang="en-US" sz="1200" b="1" dirty="0">
+                          <a:solidFill>
+                            <a:srgbClr val="FFFFFF"/>
+                          </a:solidFill>
+                          <a:latin typeface="Arial" pitchFamily="34" charset="0"/>
+                          <a:ea typeface="Arial" pitchFamily="34" charset="-122"/>
+                          <a:cs typeface="Arial" pitchFamily="34" charset="-120"/>
+                        </a:rPr>
+                        <a:t>ما تضيفه سكينة</a:t>
+                      </a:r>
+                      <a:endParaRPr lang="en-US" sz="1200" dirty="0">
+                        <a:latin typeface="Arial" charset="0"/>
+                        <a:ea typeface="Arial" charset="0"/>
+                        <a:cs typeface="Arial" charset="0"/>
+                      </a:endParaRPr>
+                    </a:p>
+                  </a:txBody>
+                  <a:tcPr marL="91440" marR="91440" marT="45720" marB="45720" anchor="ctr">
+                    <a:lnL w="6350" cap="flat" cmpd="sng" algn="ctr">
+                      <a:solidFill>
+                        <a:srgbClr val="D8DEE4"/>
+                      </a:solidFill>
+                      <a:prstDash val="solid"/>
+                      <a:round/>
+                      <a:headEnd type="none" w="med" len="med"/>
+                      <a:tailEnd type="none" w="med" len="med"/>
+                    </a:lnL>
+                    <a:lnR w="6350" cap="flat" cmpd="sng" algn="ctr">
+                      <a:solidFill>
+                        <a:srgbClr val="D8DEE4"/>
+                      </a:solidFill>
+                      <a:prstDash val="solid"/>
+                      <a:round/>
+                      <a:headEnd type="none" w="med" len="med"/>
+                      <a:tailEnd type="none" w="med" len="med"/>
+                    </a:lnR>
+                    <a:lnT w="6350" cap="flat" cmpd="sng" algn="ctr">
+                      <a:solidFill>
+                        <a:srgbClr val="D8DEE4"/>
+                      </a:solidFill>
+                      <a:prstDash val="solid"/>
+                      <a:round/>
+                      <a:headEnd type="none" w="med" len="med"/>
+                      <a:tailEnd type="none" w="med" len="med"/>
+                    </a:lnT>
+                    <a:lnB w="6350" cap="flat" cmpd="sng" algn="ctr">
+                      <a:solidFill>
+                        <a:srgbClr val="D8DEE4"/>
+                      </a:solidFill>
+                      <a:prstDash val="solid"/>
+                      <a:round/>
+                      <a:headEnd type="none" w="med" len="med"/>
+                      <a:tailEnd type="none" w="med" len="med"/>
+                    </a:lnB>
+                    <a:solidFill>
+                      <a:srgbClr val="0F1B2D"/>
+                    </a:solidFill>
+                  </a:tcPr>
+                </a:tc>
+                <a:tc>
+                  <a:txBody>
+                    <a:bodyPr/>
+                    <a:lstStyle/>
+                    <a:p>
+                      <a:pPr algn="r" indent="0" marL="0">
+                        <a:buNone/>
+                      </a:pPr>
+                      <a:r>
+                        <a:rPr lang="en-US" sz="1200" b="1" dirty="0">
+                          <a:solidFill>
+                            <a:srgbClr val="FFFFFF"/>
+                          </a:solidFill>
+                          <a:latin typeface="Arial" pitchFamily="34" charset="0"/>
+                          <a:ea typeface="Arial" pitchFamily="34" charset="-122"/>
+                          <a:cs typeface="Arial" pitchFamily="34" charset="-120"/>
+                        </a:rPr>
+                        <a:t>موجود اليوم</a:t>
+                      </a:r>
+                      <a:endParaRPr lang="en-US" sz="1200" dirty="0">
+                        <a:latin typeface="Arial" charset="0"/>
+                        <a:ea typeface="Arial" charset="0"/>
+                        <a:cs typeface="Arial" charset="0"/>
+                      </a:endParaRPr>
+                    </a:p>
+                  </a:txBody>
+                  <a:tcPr marL="91440" marR="91440" marT="45720" marB="45720" anchor="ctr">
+                    <a:lnL w="6350" cap="flat" cmpd="sng" algn="ctr">
+                      <a:solidFill>
+                        <a:srgbClr val="D8DEE4"/>
+                      </a:solidFill>
+                      <a:prstDash val="solid"/>
+                      <a:round/>
+                      <a:headEnd type="none" w="med" len="med"/>
+                      <a:tailEnd type="none" w="med" len="med"/>
+                    </a:lnL>
+                    <a:lnR w="6350" cap="flat" cmpd="sng" algn="ctr">
+                      <a:solidFill>
+                        <a:srgbClr val="D8DEE4"/>
+                      </a:solidFill>
+                      <a:prstDash val="solid"/>
+                      <a:round/>
+                      <a:headEnd type="none" w="med" len="med"/>
+                      <a:tailEnd type="none" w="med" len="med"/>
+                    </a:lnR>
+                    <a:lnT w="6350" cap="flat" cmpd="sng" algn="ctr">
+                      <a:solidFill>
+                        <a:srgbClr val="D8DEE4"/>
+                      </a:solidFill>
+                      <a:prstDash val="solid"/>
+                      <a:round/>
+                      <a:headEnd type="none" w="med" len="med"/>
+                      <a:tailEnd type="none" w="med" len="med"/>
+                    </a:lnT>
+                    <a:lnB w="6350" cap="flat" cmpd="sng" algn="ctr">
+                      <a:solidFill>
+                        <a:srgbClr val="D8DEE4"/>
+                      </a:solidFill>
+                      <a:prstDash val="solid"/>
+                      <a:round/>
+                      <a:headEnd type="none" w="med" len="med"/>
+                      <a:tailEnd type="none" w="med" len="med"/>
+                    </a:lnB>
+                    <a:solidFill>
+                      <a:srgbClr val="0F1B2D"/>
+                    </a:solidFill>
+                  </a:tcPr>
+                </a:tc>
+              </a:tr>
+              <a:tr h="941832">
+                <a:tc>
+                  <a:txBody>
+                    <a:bodyPr/>
+                    <a:lstStyle/>
+                    <a:p>
+                      <a:pPr algn="r" indent="0" marL="0">
+                        <a:buNone/>
+                      </a:pPr>
+                      <a:r>
+                        <a:rPr lang="en-US" sz="1200" dirty="0">
+                          <a:solidFill>
+                            <a:srgbClr val="16202B"/>
+                          </a:solidFill>
+                          <a:latin typeface="Arial" pitchFamily="34" charset="0"/>
+                          <a:ea typeface="Arial" pitchFamily="34" charset="-122"/>
+                          <a:cs typeface="Arial" pitchFamily="34" charset="-120"/>
+                        </a:rPr>
+                        <a:t>تُغلق الحلقة: استشعار، حكم، فعل — دون تدخل من المشغّل ودون عتاد جديد؛ كل حاجّ يحمل المستشعر بالفعل.</a:t>
+                      </a:r>
+                      <a:endParaRPr lang="en-US" sz="1200" dirty="0">
+                        <a:latin typeface="Arial" charset="0"/>
+                        <a:ea typeface="Arial" charset="0"/>
+                        <a:cs typeface="Arial" charset="0"/>
+                      </a:endParaRPr>
+                    </a:p>
+                  </a:txBody>
+                  <a:tcPr marL="91440" marR="91440" marT="45720" marB="45720" anchor="ctr">
+                    <a:lnL w="6350" cap="flat" cmpd="sng" algn="ctr">
+                      <a:solidFill>
+                        <a:srgbClr val="D8DEE4"/>
+                      </a:solidFill>
+                      <a:prstDash val="solid"/>
+                      <a:round/>
+                      <a:headEnd type="none" w="med" len="med"/>
+                      <a:tailEnd type="none" w="med" len="med"/>
+                    </a:lnL>
+                    <a:lnR w="6350" cap="flat" cmpd="sng" algn="ctr">
+                      <a:solidFill>
+                        <a:srgbClr val="D8DEE4"/>
+                      </a:solidFill>
+                      <a:prstDash val="solid"/>
+                      <a:round/>
+                      <a:headEnd type="none" w="med" len="med"/>
+                      <a:tailEnd type="none" w="med" len="med"/>
+                    </a:lnR>
+                    <a:lnT w="6350" cap="flat" cmpd="sng" algn="ctr">
+                      <a:solidFill>
+                        <a:srgbClr val="D8DEE4"/>
+                      </a:solidFill>
+                      <a:prstDash val="solid"/>
+                      <a:round/>
+                      <a:headEnd type="none" w="med" len="med"/>
+                      <a:tailEnd type="none" w="med" len="med"/>
+                    </a:lnT>
+                    <a:lnB w="6350" cap="flat" cmpd="sng" algn="ctr">
+                      <a:solidFill>
+                        <a:srgbClr val="D8DEE4"/>
+                      </a:solidFill>
+                      <a:prstDash val="solid"/>
+                      <a:round/>
+                      <a:headEnd type="none" w="med" len="med"/>
+                      <a:tailEnd type="none" w="med" len="med"/>
+                    </a:lnB>
+                  </a:tcPr>
+                </a:tc>
+                <a:tc>
+                  <a:txBody>
+                    <a:bodyPr/>
+                    <a:lstStyle/>
+                    <a:p>
+                      <a:pPr algn="r" indent="0" marL="0">
+                        <a:buNone/>
+                      </a:pPr>
+                      <a:r>
+                        <a:rPr lang="en-US" sz="1200" dirty="0">
+                          <a:solidFill>
+                            <a:srgbClr val="16202B"/>
+                          </a:solidFill>
+                          <a:latin typeface="Arial" pitchFamily="34" charset="0"/>
+                          <a:ea typeface="Arial" pitchFamily="34" charset="-122"/>
+                          <a:cs typeface="Arial" pitchFamily="34" charset="-120"/>
+                        </a:rPr>
+                        <a:t>الشبكة كمستشعر للحشود — بحث على بيانات الإشارات (PLOS ONE 2024)؛ واجهات كثافة السكان في باريس 2024</a:t>
+                      </a:r>
+                      <a:endParaRPr lang="en-US" sz="1200" dirty="0">
+                        <a:latin typeface="Arial" charset="0"/>
+                        <a:ea typeface="Arial" charset="0"/>
+                        <a:cs typeface="Arial" charset="0"/>
+                      </a:endParaRPr>
+                    </a:p>
+                  </a:txBody>
+                  <a:tcPr marL="91440" marR="91440" marT="45720" marB="45720" anchor="ctr">
+                    <a:lnL w="6350" cap="flat" cmpd="sng" algn="ctr">
+                      <a:solidFill>
+                        <a:srgbClr val="D8DEE4"/>
+                      </a:solidFill>
+                      <a:prstDash val="solid"/>
+                      <a:round/>
+                      <a:headEnd type="none" w="med" len="med"/>
+                      <a:tailEnd type="none" w="med" len="med"/>
+                    </a:lnL>
+                    <a:lnR w="6350" cap="flat" cmpd="sng" algn="ctr">
+                      <a:solidFill>
+                        <a:srgbClr val="D8DEE4"/>
+                      </a:solidFill>
+                      <a:prstDash val="solid"/>
+                      <a:round/>
+                      <a:headEnd type="none" w="med" len="med"/>
+                      <a:tailEnd type="none" w="med" len="med"/>
+                    </a:lnR>
+                    <a:lnT w="6350" cap="flat" cmpd="sng" algn="ctr">
+                      <a:solidFill>
+                        <a:srgbClr val="D8DEE4"/>
+                      </a:solidFill>
+                      <a:prstDash val="solid"/>
+                      <a:round/>
+                      <a:headEnd type="none" w="med" len="med"/>
+                      <a:tailEnd type="none" w="med" len="med"/>
+                    </a:lnT>
+                    <a:lnB w="6350" cap="flat" cmpd="sng" algn="ctr">
+                      <a:solidFill>
+                        <a:srgbClr val="D8DEE4"/>
+                      </a:solidFill>
+                      <a:prstDash val="solid"/>
+                      <a:round/>
+                      <a:headEnd type="none" w="med" len="med"/>
+                      <a:tailEnd type="none" w="med" len="med"/>
+                    </a:lnB>
+                  </a:tcPr>
+                </a:tc>
+              </a:tr>
+              <a:tr h="941832">
+                <a:tc>
+                  <a:txBody>
+                    <a:bodyPr/>
+                    <a:lstStyle/>
+                    <a:p>
+                      <a:pPr algn="r" indent="0" marL="0">
+                        <a:buNone/>
+                      </a:pPr>
+                      <a:r>
+                        <a:rPr lang="en-US" sz="1200" dirty="0">
+                          <a:solidFill>
+                            <a:srgbClr val="16202B"/>
+                          </a:solidFill>
+                          <a:latin typeface="Arial" pitchFamily="34" charset="0"/>
+                          <a:ea typeface="Arial" pitchFamily="34" charset="-122"/>
+                          <a:cs typeface="Arial" pitchFamily="34" charset="-120"/>
+                        </a:rPr>
+                        <a:t>تزن الأدلة: كل قراءة تحمل ثقتها؛ يسأل الوكيل هل الانخفاض تفرّق أم عمى، ويقرّر متى يستحق الشك استدعاءات إضافية.</a:t>
+                      </a:r>
+                      <a:endParaRPr lang="en-US" sz="1200" dirty="0">
+                        <a:latin typeface="Arial" charset="0"/>
+                        <a:ea typeface="Arial" charset="0"/>
+                        <a:cs typeface="Arial" charset="0"/>
+                      </a:endParaRPr>
+                    </a:p>
+                  </a:txBody>
+                  <a:tcPr marL="91440" marR="91440" marT="45720" marB="45720" anchor="ctr">
+                    <a:lnL w="6350" cap="flat" cmpd="sng" algn="ctr">
+                      <a:solidFill>
+                        <a:srgbClr val="D8DEE4"/>
+                      </a:solidFill>
+                      <a:prstDash val="solid"/>
+                      <a:round/>
+                      <a:headEnd type="none" w="med" len="med"/>
+                      <a:tailEnd type="none" w="med" len="med"/>
+                    </a:lnL>
+                    <a:lnR w="6350" cap="flat" cmpd="sng" algn="ctr">
+                      <a:solidFill>
+                        <a:srgbClr val="D8DEE4"/>
+                      </a:solidFill>
+                      <a:prstDash val="solid"/>
+                      <a:round/>
+                      <a:headEnd type="none" w="med" len="med"/>
+                      <a:tailEnd type="none" w="med" len="med"/>
+                    </a:lnR>
+                    <a:lnT w="6350" cap="flat" cmpd="sng" algn="ctr">
+                      <a:solidFill>
+                        <a:srgbClr val="D8DEE4"/>
+                      </a:solidFill>
+                      <a:prstDash val="solid"/>
+                      <a:round/>
+                      <a:headEnd type="none" w="med" len="med"/>
+                      <a:tailEnd type="none" w="med" len="med"/>
+                    </a:lnT>
+                    <a:lnB w="6350" cap="flat" cmpd="sng" algn="ctr">
+                      <a:solidFill>
+                        <a:srgbClr val="D8DEE4"/>
+                      </a:solidFill>
+                      <a:prstDash val="solid"/>
+                      <a:round/>
+                      <a:headEnd type="none" w="med" len="med"/>
+                      <a:tailEnd type="none" w="med" len="med"/>
+                    </a:lnB>
+                  </a:tcPr>
+                </a:tc>
+                <a:tc>
+                  <a:txBody>
+                    <a:bodyPr/>
+                    <a:lstStyle/>
+                    <a:p>
+                      <a:pPr algn="r" indent="0" marL="0">
+                        <a:buNone/>
+                      </a:pPr>
+                      <a:r>
+                        <a:rPr lang="en-US" sz="1200" dirty="0">
+                          <a:solidFill>
+                            <a:srgbClr val="16202B"/>
+                          </a:solidFill>
+                          <a:latin typeface="Arial" pitchFamily="34" charset="0"/>
+                          <a:ea typeface="Arial" pitchFamily="34" charset="-122"/>
+                          <a:cs typeface="Arial" pitchFamily="34" charset="-120"/>
+                        </a:rPr>
+                        <a:t>وكلاء يرفعون QoD عند الازدحام — Nokia مع Summit Tech في MWC26، لبثّ 8K</a:t>
+                      </a:r>
+                      <a:endParaRPr lang="en-US" sz="1200" dirty="0">
+                        <a:latin typeface="Arial" charset="0"/>
+                        <a:ea typeface="Arial" charset="0"/>
+                        <a:cs typeface="Arial" charset="0"/>
+                      </a:endParaRPr>
+                    </a:p>
+                  </a:txBody>
+                  <a:tcPr marL="91440" marR="91440" marT="45720" marB="45720" anchor="ctr">
+                    <a:lnL w="6350" cap="flat" cmpd="sng" algn="ctr">
+                      <a:solidFill>
+                        <a:srgbClr val="D8DEE4"/>
+                      </a:solidFill>
+                      <a:prstDash val="solid"/>
+                      <a:round/>
+                      <a:headEnd type="none" w="med" len="med"/>
+                      <a:tailEnd type="none" w="med" len="med"/>
+                    </a:lnL>
+                    <a:lnR w="6350" cap="flat" cmpd="sng" algn="ctr">
+                      <a:solidFill>
+                        <a:srgbClr val="D8DEE4"/>
+                      </a:solidFill>
+                      <a:prstDash val="solid"/>
+                      <a:round/>
+                      <a:headEnd type="none" w="med" len="med"/>
+                      <a:tailEnd type="none" w="med" len="med"/>
+                    </a:lnR>
+                    <a:lnT w="6350" cap="flat" cmpd="sng" algn="ctr">
+                      <a:solidFill>
+                        <a:srgbClr val="D8DEE4"/>
+                      </a:solidFill>
+                      <a:prstDash val="solid"/>
+                      <a:round/>
+                      <a:headEnd type="none" w="med" len="med"/>
+                      <a:tailEnd type="none" w="med" len="med"/>
+                    </a:lnT>
+                    <a:lnB w="6350" cap="flat" cmpd="sng" algn="ctr">
+                      <a:solidFill>
+                        <a:srgbClr val="D8DEE4"/>
+                      </a:solidFill>
+                      <a:prstDash val="solid"/>
+                      <a:round/>
+                      <a:headEnd type="none" w="med" len="med"/>
+                      <a:tailEnd type="none" w="med" len="med"/>
+                    </a:lnB>
+                  </a:tcPr>
+                </a:tc>
+              </a:tr>
+              <a:tr h="941832">
+                <a:tc>
+                  <a:txBody>
+                    <a:bodyPr/>
+                    <a:lstStyle/>
+                    <a:p>
+                      <a:pPr algn="r" indent="0" marL="0">
+                        <a:buNone/>
+                      </a:pPr>
+                      <a:r>
+                        <a:rPr lang="en-US" sz="1200" dirty="0">
+                          <a:solidFill>
+                            <a:srgbClr val="16202B"/>
+                          </a:solidFill>
+                          <a:latin typeface="Arial" pitchFamily="34" charset="0"/>
+                          <a:ea typeface="Arial" pitchFamily="34" charset="-122"/>
+                          <a:cs typeface="Arial" pitchFamily="34" charset="-120"/>
+                        </a:rPr>
+                        <a:t>تحكم الطيف لا المال: تبديل الشريحة والتجوال والتحقق من الموقع تقرّر من ينال الأولوية. لا نموذج، لا رفع — تفشل مغلقةً.</a:t>
+                      </a:r>
+                      <a:endParaRPr lang="en-US" sz="1200" dirty="0">
+                        <a:latin typeface="Arial" charset="0"/>
+                        <a:ea typeface="Arial" charset="0"/>
+                        <a:cs typeface="Arial" charset="0"/>
+                      </a:endParaRPr>
+                    </a:p>
+                  </a:txBody>
+                  <a:tcPr marL="91440" marR="91440" marT="45720" marB="45720" anchor="ctr">
+                    <a:lnL w="6350" cap="flat" cmpd="sng" algn="ctr">
+                      <a:solidFill>
+                        <a:srgbClr val="D8DEE4"/>
+                      </a:solidFill>
+                      <a:prstDash val="solid"/>
+                      <a:round/>
+                      <a:headEnd type="none" w="med" len="med"/>
+                      <a:tailEnd type="none" w="med" len="med"/>
+                    </a:lnL>
+                    <a:lnR w="6350" cap="flat" cmpd="sng" algn="ctr">
+                      <a:solidFill>
+                        <a:srgbClr val="D8DEE4"/>
+                      </a:solidFill>
+                      <a:prstDash val="solid"/>
+                      <a:round/>
+                      <a:headEnd type="none" w="med" len="med"/>
+                      <a:tailEnd type="none" w="med" len="med"/>
+                    </a:lnR>
+                    <a:lnT w="6350" cap="flat" cmpd="sng" algn="ctr">
+                      <a:solidFill>
+                        <a:srgbClr val="D8DEE4"/>
+                      </a:solidFill>
+                      <a:prstDash val="solid"/>
+                      <a:round/>
+                      <a:headEnd type="none" w="med" len="med"/>
+                      <a:tailEnd type="none" w="med" len="med"/>
+                    </a:lnT>
+                    <a:lnB w="6350" cap="flat" cmpd="sng" algn="ctr">
+                      <a:solidFill>
+                        <a:srgbClr val="D8DEE4"/>
+                      </a:solidFill>
+                      <a:prstDash val="solid"/>
+                      <a:round/>
+                      <a:headEnd type="none" w="med" len="med"/>
+                      <a:tailEnd type="none" w="med" len="med"/>
+                    </a:lnB>
+                  </a:tcPr>
+                </a:tc>
+                <a:tc>
+                  <a:txBody>
+                    <a:bodyPr/>
+                    <a:lstStyle/>
+                    <a:p>
+                      <a:pPr algn="r" indent="0" marL="0">
+                        <a:buNone/>
+                      </a:pPr>
+                      <a:r>
+                        <a:rPr lang="en-US" sz="1200" dirty="0">
+                          <a:solidFill>
+                            <a:srgbClr val="16202B"/>
+                          </a:solidFill>
+                          <a:latin typeface="Arial" pitchFamily="34" charset="0"/>
+                          <a:ea typeface="Arial" pitchFamily="34" charset="-122"/>
+                          <a:cs typeface="Arial" pitchFamily="34" charset="-120"/>
+                        </a:rPr>
+                        <a:t>فحص تبديل الشريحة يحكم دفعة — المساعد المصرفي من Orange، يوليو 2026</a:t>
+                      </a:r>
+                      <a:endParaRPr lang="en-US" sz="1200" dirty="0">
+                        <a:latin typeface="Arial" charset="0"/>
+                        <a:ea typeface="Arial" charset="0"/>
+                        <a:cs typeface="Arial" charset="0"/>
+                      </a:endParaRPr>
+                    </a:p>
+                  </a:txBody>
+                  <a:tcPr marL="91440" marR="91440" marT="45720" marB="45720" anchor="ctr">
+                    <a:lnL w="6350" cap="flat" cmpd="sng" algn="ctr">
+                      <a:solidFill>
+                        <a:srgbClr val="D8DEE4"/>
+                      </a:solidFill>
+                      <a:prstDash val="solid"/>
+                      <a:round/>
+                      <a:headEnd type="none" w="med" len="med"/>
+                      <a:tailEnd type="none" w="med" len="med"/>
+                    </a:lnL>
+                    <a:lnR w="6350" cap="flat" cmpd="sng" algn="ctr">
+                      <a:solidFill>
+                        <a:srgbClr val="D8DEE4"/>
+                      </a:solidFill>
+                      <a:prstDash val="solid"/>
+                      <a:round/>
+                      <a:headEnd type="none" w="med" len="med"/>
+                      <a:tailEnd type="none" w="med" len="med"/>
+                    </a:lnR>
+                    <a:lnT w="6350" cap="flat" cmpd="sng" algn="ctr">
+                      <a:solidFill>
+                        <a:srgbClr val="D8DEE4"/>
+                      </a:solidFill>
+                      <a:prstDash val="solid"/>
+                      <a:round/>
+                      <a:headEnd type="none" w="med" len="med"/>
+                      <a:tailEnd type="none" w="med" len="med"/>
+                    </a:lnT>
+                    <a:lnB w="6350" cap="flat" cmpd="sng" algn="ctr">
+                      <a:solidFill>
+                        <a:srgbClr val="D8DEE4"/>
+                      </a:solidFill>
+                      <a:prstDash val="solid"/>
+                      <a:round/>
+                      <a:headEnd type="none" w="med" len="med"/>
+                      <a:tailEnd type="none" w="med" len="med"/>
+                    </a:lnB>
+                  </a:tcPr>
+                </a:tc>
+              </a:tr>
+            </a:tbl>
+          </a:graphicData>
+        </a:graphic>
+      </p:graphicFrame>
+      <p:sp>
+        <p:nvSpPr>
+          <p:cNvPr id="5" name="Shape 2"/>
+          <p:cNvSpPr/>
+          <p:nvPr/>
+        </p:nvSpPr>
+        <p:spPr>
+          <a:xfrm>
+            <a:off x="548640" y="1417320"/>
+            <a:ext cx="3566160" cy="4709160"/>
+          </a:xfrm>
+          <a:prstGeom prst="rect">
+            <a:avLst/>
+          </a:prstGeom>
+          <a:solidFill>
+            <a:srgbClr val="0F1B2D"/>
+          </a:solidFill>
+          <a:ln/>
+        </p:spPr>
+      </p:sp>
+      <p:sp>
+        <p:nvSpPr>
+          <p:cNvPr id="6" name="Text 3"/>
+          <p:cNvSpPr/>
+          <p:nvPr/>
+        </p:nvSpPr>
+        <p:spPr>
+          <a:xfrm>
+            <a:off x="777240" y="1600200"/>
+            <a:ext cx="3108960" cy="365760"/>
+          </a:xfrm>
+          <a:prstGeom prst="rect">
+            <a:avLst/>
+          </a:prstGeom>
+          <a:noFill/>
+          <a:ln/>
+        </p:spPr>
+        <p:txBody>
+          <a:bodyPr wrap="square" lIns="0" tIns="0" rIns="0" bIns="0" rtlCol="0" anchor="ctr"/>
+          <a:lstStyle/>
+          <a:p>
+            <a:pPr rtl="1" algn="r" indent="0" marL="0">
+              <a:buNone/>
+            </a:pPr>
+            <a:r>
+              <a:rPr lang="en-US" sz="1500" b="1" dirty="0">
+                <a:solidFill>
+                  <a:srgbClr val="FFFFFF"/>
+                </a:solidFill>
+                <a:latin typeface="Traditional Arabic" pitchFamily="34" charset="0"/>
+                <a:ea typeface="Traditional Arabic" pitchFamily="34" charset="-122"/>
+                <a:cs typeface="Traditional Arabic" pitchFamily="34" charset="-120"/>
+              </a:rPr>
+              <a:t>ما يكسبه مركز التحكم</a:t>
+            </a:r>
+            <a:endParaRPr lang="en-US" sz="1500" dirty="0"/>
+          </a:p>
+        </p:txBody>
+      </p:sp>
+      <p:sp>
+        <p:nvSpPr>
+          <p:cNvPr id="7" name="Text 4"/>
+          <p:cNvSpPr/>
+          <p:nvPr/>
+        </p:nvSpPr>
+        <p:spPr>
+          <a:xfrm>
+            <a:off x="777240" y="2057400"/>
+            <a:ext cx="3108960" cy="411480"/>
+          </a:xfrm>
+          <a:prstGeom prst="rect">
+            <a:avLst/>
+          </a:prstGeom>
+          <a:noFill/>
+          <a:ln/>
+        </p:spPr>
+        <p:txBody>
+          <a:bodyPr wrap="square" lIns="0" tIns="0" rIns="0" bIns="0" rtlCol="0" anchor="ctr"/>
+          <a:lstStyle/>
+          <a:p>
+            <a:pPr rtl="1" algn="r" indent="0" marL="0">
+              <a:lnSpc>
+                <a:spcPct val="115000"/>
+              </a:lnSpc>
+              <a:buNone/>
+            </a:pPr>
+            <a:r>
+              <a:rPr lang="en-US" sz="1200" dirty="0">
+                <a:solidFill>
+                  <a:srgbClr val="EDEFE9"/>
+                </a:solidFill>
+                <a:latin typeface="Arial" pitchFamily="34" charset="0"/>
+                <a:ea typeface="Arial" pitchFamily="34" charset="-122"/>
+                <a:cs typeface="Arial" pitchFamily="34" charset="-120"/>
+              </a:rPr>
+              <a:t>• إنذار أبكر — دون عتاد جديد</a:t>
+            </a:r>
+            <a:endParaRPr lang="en-US" sz="1200" dirty="0"/>
+          </a:p>
+        </p:txBody>
+      </p:sp>
+      <p:sp>
+        <p:nvSpPr>
+          <p:cNvPr id="8" name="Text 5"/>
+          <p:cNvSpPr/>
+          <p:nvPr/>
+        </p:nvSpPr>
+        <p:spPr>
+          <a:xfrm>
+            <a:off x="777240" y="2514600"/>
+            <a:ext cx="3108960" cy="411480"/>
+          </a:xfrm>
+          <a:prstGeom prst="rect">
+            <a:avLst/>
+          </a:prstGeom>
+          <a:noFill/>
+          <a:ln/>
+        </p:spPr>
+        <p:txBody>
+          <a:bodyPr wrap="square" lIns="0" tIns="0" rIns="0" bIns="0" rtlCol="0" anchor="ctr"/>
+          <a:lstStyle/>
+          <a:p>
+            <a:pPr rtl="1" algn="r" indent="0" marL="0">
+              <a:lnSpc>
+                <a:spcPct val="115000"/>
+              </a:lnSpc>
+              <a:buNone/>
+            </a:pPr>
+            <a:r>
+              <a:rPr lang="en-US" sz="1200" dirty="0">
+                <a:solidFill>
+                  <a:srgbClr val="EDEFE9"/>
+                </a:solidFill>
+                <a:latin typeface="Arial" pitchFamily="34" charset="0"/>
+                <a:ea typeface="Arial" pitchFamily="34" charset="-122"/>
+                <a:cs typeface="Arial" pitchFamily="34" charset="-120"/>
+              </a:rPr>
+              <a:t>• لا طمأنينة زائفة من قراءة «منخفض» تبدو واثقة</a:t>
+            </a:r>
+            <a:endParaRPr lang="en-US" sz="1200" dirty="0"/>
+          </a:p>
+        </p:txBody>
+      </p:sp>
+      <p:sp>
+        <p:nvSpPr>
+          <p:cNvPr id="9" name="Text 6"/>
+          <p:cNvSpPr/>
+          <p:nvPr/>
+        </p:nvSpPr>
+        <p:spPr>
+          <a:xfrm>
+            <a:off x="777240" y="2971800"/>
+            <a:ext cx="3108960" cy="411480"/>
+          </a:xfrm>
+          <a:prstGeom prst="rect">
+            <a:avLst/>
+          </a:prstGeom>
+          <a:noFill/>
+          <a:ln/>
+        </p:spPr>
+        <p:txBody>
+          <a:bodyPr wrap="square" lIns="0" tIns="0" rIns="0" bIns="0" rtlCol="0" anchor="ctr"/>
+          <a:lstStyle/>
+          <a:p>
+            <a:pPr rtl="1" algn="r" indent="0" marL="0">
+              <a:lnSpc>
+                <a:spcPct val="115000"/>
+              </a:lnSpc>
+              <a:buNone/>
+            </a:pPr>
+            <a:r>
+              <a:rPr lang="en-US" sz="1200" dirty="0">
+                <a:solidFill>
+                  <a:srgbClr val="EDEFE9"/>
+                </a:solidFill>
+                <a:latin typeface="Arial" pitchFamily="34" charset="0"/>
+                <a:ea typeface="Arial" pitchFamily="34" charset="-122"/>
+                <a:cs typeface="Arial" pitchFamily="34" charset="-120"/>
+              </a:rPr>
+              <a:t>• نطاق ترددي ذو أولوية لا يناله منتحل</a:t>
+            </a:r>
+            <a:endParaRPr lang="en-US" sz="1200" dirty="0"/>
+          </a:p>
+        </p:txBody>
+      </p:sp>
+      <p:sp>
+        <p:nvSpPr>
+          <p:cNvPr id="10" name="Text 7"/>
+          <p:cNvSpPr/>
+          <p:nvPr/>
+        </p:nvSpPr>
+        <p:spPr>
+          <a:xfrm>
+            <a:off x="777240" y="3429000"/>
+            <a:ext cx="3108960" cy="411480"/>
+          </a:xfrm>
+          <a:prstGeom prst="rect">
+            <a:avLst/>
+          </a:prstGeom>
+          <a:noFill/>
+          <a:ln/>
+        </p:spPr>
+        <p:txBody>
+          <a:bodyPr wrap="square" lIns="0" tIns="0" rIns="0" bIns="0" rtlCol="0" anchor="ctr"/>
+          <a:lstStyle/>
+          <a:p>
+            <a:pPr rtl="1" algn="r" indent="0" marL="0">
+              <a:lnSpc>
+                <a:spcPct val="115000"/>
+              </a:lnSpc>
+              <a:buNone/>
+            </a:pPr>
+            <a:r>
+              <a:rPr lang="en-US" sz="1200" dirty="0">
+                <a:solidFill>
+                  <a:srgbClr val="EDEFE9"/>
+                </a:solidFill>
+                <a:latin typeface="Arial" pitchFamily="34" charset="0"/>
+                <a:ea typeface="Arial" pitchFamily="34" charset="-122"/>
+                <a:cs typeface="Arial" pitchFamily="34" charset="-120"/>
+              </a:rPr>
+              <a:t>• كل فعل يشرح نفسه — مصدر كل استدعاء موثّق</a:t>
+            </a:r>
+            <a:endParaRPr lang="en-US" sz="1200" dirty="0"/>
+          </a:p>
+        </p:txBody>
+      </p:sp>
+      <p:sp>
+        <p:nvSpPr>
+          <p:cNvPr id="11" name="Shape 8"/>
+          <p:cNvSpPr/>
+          <p:nvPr/>
+        </p:nvSpPr>
+        <p:spPr>
+          <a:xfrm>
+            <a:off x="777240" y="3977640"/>
+            <a:ext cx="2880360" cy="0"/>
+          </a:xfrm>
+          <a:prstGeom prst="line">
+            <a:avLst/>
+          </a:prstGeom>
+          <a:noFill/>
+          <a:ln w="6350">
+            <a:solidFill>
+              <a:srgbClr val="9FB0C7"/>
+            </a:solidFill>
+            <a:prstDash val="solid"/>
+          </a:ln>
+        </p:spPr>
+      </p:sp>
+      <p:sp>
+        <p:nvSpPr>
+          <p:cNvPr id="12" name="Text 9"/>
+          <p:cNvSpPr/>
+          <p:nvPr/>
+        </p:nvSpPr>
+        <p:spPr>
+          <a:xfrm>
+            <a:off x="777240" y="4160520"/>
+            <a:ext cx="3108960" cy="822960"/>
+          </a:xfrm>
+          <a:prstGeom prst="rect">
+            <a:avLst/>
+          </a:prstGeom>
+          <a:noFill/>
+          <a:ln/>
+        </p:spPr>
+        <p:txBody>
+          <a:bodyPr wrap="square" lIns="0" tIns="0" rIns="0" bIns="0" rtlCol="0" anchor="ctr"/>
+          <a:lstStyle/>
+          <a:p>
+            <a:pPr rtl="1" algn="r" indent="0" marL="0">
+              <a:lnSpc>
+                <a:spcPct val="120000"/>
+              </a:lnSpc>
+              <a:buNone/>
+            </a:pPr>
+            <a:r>
+              <a:rPr lang="en-US" sz="1150" i="1" dirty="0">
+                <a:solidFill>
+                  <a:srgbClr val="C7922E"/>
+                </a:solidFill>
+                <a:latin typeface="Arial" pitchFamily="34" charset="0"/>
+                <a:ea typeface="Arial" pitchFamily="34" charset="-122"/>
+                <a:cs typeface="Arial" pitchFamily="34" charset="-120"/>
+              </a:rPr>
+              <a:t>المصادر: Lemaire et al., PLOS ONE 2024 · Orange Flux Vision, Paris 2024 · Nokia × Summit Tech, MWC26 · Orange Developer, Jul 2026 · KFUPM US 12,417,639</a:t>
+            </a:r>
+            <a:endParaRPr lang="en-US" sz="1150" dirty="0"/>
+          </a:p>
+        </p:txBody>
+      </p:sp>
+      <p:sp>
+        <p:nvSpPr>
+          <p:cNvPr id="13" name="Text 10"/>
+          <p:cNvSpPr/>
+          <p:nvPr/>
+        </p:nvSpPr>
+        <p:spPr>
+          <a:xfrm>
+            <a:off x="365760" y="6400800"/>
+            <a:ext cx="457200" cy="274320"/>
+          </a:xfrm>
+          <a:prstGeom prst="rect">
+            <a:avLst/>
+          </a:prstGeom>
+          <a:noFill/>
+          <a:ln/>
+        </p:spPr>
+        <p:txBody>
+          <a:bodyPr wrap="square" lIns="0" tIns="0" rIns="0" bIns="0" rtlCol="0" anchor="ctr"/>
+          <a:lstStyle/>
+          <a:p>
+            <a:pPr algn="l" indent="0" marL="0">
+              <a:buNone/>
+            </a:pPr>
+            <a:r>
+              <a:rPr lang="en-US" sz="1000" dirty="0">
+                <a:solidFill>
+                  <a:srgbClr val="5B6B7A"/>
+                </a:solidFill>
+                <a:latin typeface="Consolas" pitchFamily="34" charset="0"/>
+                <a:ea typeface="Consolas" pitchFamily="34" charset="-122"/>
+                <a:cs typeface="Consolas" pitchFamily="34" charset="-120"/>
+              </a:rPr>
+              <a:t>12</a:t>
             </a:r>
             <a:endParaRPr lang="en-US" sz="1000" dirty="0"/>
           </a:p>
@@ -9410,7 +10416,7 @@
                 <a:ea typeface="Traditional Arabic" pitchFamily="34" charset="-122"/>
                 <a:cs typeface="Traditional Arabic" pitchFamily="34" charset="-120"/>
               </a:rPr>
-              <a:t>5</a:t>
+              <a:t>7</a:t>
             </a:r>
             <a:endParaRPr lang="en-US" sz="2400" dirty="0"/>
           </a:p>
@@ -9452,7 +10458,7 @@
                 <a:ea typeface="Arial" pitchFamily="34" charset="-122"/>
                 <a:cs typeface="Arial" pitchFamily="34" charset="-120"/>
               </a:rPr>
-              <a:t>عائلات واجهات استُخدمت حيًّا من البداية للنهاية</a:t>
+              <a:t>واجهات CAMARA استُخدمت حيًّا — ست منها داخل الدورة</a:t>
             </a:r>
             <a:endParaRPr lang="en-US" sz="1100" dirty="0"/>
           </a:p>
@@ -9491,7 +10497,7 @@
                 <a:ea typeface="Traditional Arabic" pitchFamily="34" charset="-122"/>
                 <a:cs typeface="Traditional Arabic" pitchFamily="34" charset="-120"/>
               </a:rPr>
-              <a:t>21</a:t>
+              <a:t>53</a:t>
             </a:r>
             <a:endParaRPr lang="en-US" sz="2400" dirty="0"/>
           </a:p>
@@ -9533,7 +10539,7 @@
                 <a:ea typeface="Arial" pitchFamily="34" charset="-122"/>
                 <a:cs typeface="Arial" pitchFamily="34" charset="-120"/>
               </a:rPr>
-              <a:t>اختبارًا على نواة الترجيح بالثقة</a:t>
+              <a:t>اختبارًا آليًّا — تكامل مستمر مع كل دفعة</a:t>
             </a:r>
             <a:endParaRPr lang="en-US" sz="1100" dirty="0"/>
           </a:p>
@@ -13025,7 +14031,7 @@
                 <a:ea typeface="Arial" pitchFamily="34" charset="-122"/>
                 <a:cs typeface="Arial" pitchFamily="34" charset="-120"/>
               </a:rPr>
-              <a:t>مُخرَج مرحلة الفكرة هو الاستدلال، لا واجهة مستخدم مصقولة — وحدة التحكم الكاملة والفيديو التوضيحي يصلان في نموذج المرحلة 2 (تقديم سبتمبر).</a:t>
+              <a:t>مرحلة النموذج الأولي: وحدة التحكم حيّة على sakina.streamlit.app · فيديو توضيحي بتعليق صوتي · 53 اختبارًا · تكامل مستمر مع كل دفعة · وضع إعادة التشغيل دون أي مفاتيح.</a:t>
             </a:r>
             <a:endParaRPr lang="en-US" sz="1200" dirty="0"/>
           </a:p>
@@ -13487,7 +14493,7 @@
                 <a:ea typeface="Traditional Arabic" pitchFamily="34" charset="-122"/>
                 <a:cs typeface="Traditional Arabic" pitchFamily="34" charset="-120"/>
               </a:rPr>
-              <a:t>5/5</a:t>
+              <a:t>7/7</a:t>
             </a:r>
             <a:endParaRPr lang="en-US" sz="2800" dirty="0"/>
           </a:p>
@@ -13529,7 +14535,7 @@
                 <a:ea typeface="Arial" pitchFamily="34" charset="-122"/>
                 <a:cs typeface="Arial" pitchFamily="34" charset="-120"/>
               </a:rPr>
-              <a:t>واجهات استخدمها الوكيل تم التحقق منها حيًّا (الازدحام، الموقع، حالة الجهاز، تبديل الشريحة، QoD)</a:t>
+              <a:t>واجهات CAMARA تم التحقق منها حيًّا — الازدحام، الموقع، التحقق من الموقع، حالة الجهاز، تبديل الشريحة، QoD، السياج الجغرافي</a:t>
             </a:r>
             <a:endParaRPr lang="en-US" sz="1100" dirty="0"/>
           </a:p>
